--- a/no_code_app/build_local_apps_presentation.pptx
+++ b/no_code_app/build_local_apps_presentation.pptx
@@ -8853,7 +8853,7 @@
                 <a:ea typeface="Trebuchet MS" pitchFamily="34" charset="-122"/>
                 <a:cs typeface="Trebuchet MS" pitchFamily="34" charset="-120"/>
               </a:rPr>
-              <a:t>Python 3.11+</a:t>
+              <a:t>Python 3.13+</a:t>
             </a:r>
             <a:endParaRPr lang="en-US" sz="1400" dirty="0"/>
           </a:p>
